--- a/Loan Approval Prediction/Loan Approval Prediction.pptx
+++ b/Loan Approval Prediction/Loan Approval Prediction.pptx
@@ -5,7 +5,7 @@
     <p:sldMasterId id="2147483648" r:id="rId1"/>
   </p:sldMasterIdLst>
   <p:notesMasterIdLst>
-    <p:notesMasterId r:id="rId12"/>
+    <p:notesMasterId r:id="rId13"/>
   </p:notesMasterIdLst>
   <p:sldIdLst>
     <p:sldId id="256" r:id="rId2"/>
@@ -17,7 +17,8 @@
     <p:sldId id="262" r:id="rId8"/>
     <p:sldId id="263" r:id="rId9"/>
     <p:sldId id="264" r:id="rId10"/>
-    <p:sldId id="265" r:id="rId11"/>
+    <p:sldId id="266" r:id="rId11"/>
+    <p:sldId id="265" r:id="rId12"/>
   </p:sldIdLst>
   <p:sldSz cx="9144000" cy="5143500" type="screen16x9"/>
   <p:notesSz cx="5143500" cy="9144000"/>
@@ -335,6 +336,114 @@
   <p:cSld>
     <p:spTree>
       <p:nvGrpSpPr>
+        <p:cNvPr id="1" name="">
+          <a:extLst>
+            <a:ext uri="{FF2B5EF4-FFF2-40B4-BE49-F238E27FC236}">
+              <a16:creationId xmlns:a16="http://schemas.microsoft.com/office/drawing/2014/main" id="{26AC31FC-55E2-1AAE-E093-A2E06F11BE39}"/>
+            </a:ext>
+          </a:extLst>
+        </p:cNvPr>
+        <p:cNvGrpSpPr/>
+        <p:nvPr/>
+      </p:nvGrpSpPr>
+      <p:grpSpPr>
+        <a:xfrm>
+          <a:off x="0" y="0"/>
+          <a:ext cx="0" cy="0"/>
+          <a:chOff x="0" y="0"/>
+          <a:chExt cx="0" cy="0"/>
+        </a:xfrm>
+      </p:grpSpPr>
+      <p:sp>
+        <p:nvSpPr>
+          <p:cNvPr id="2" name="Slide Image Placeholder 1">
+            <a:extLst>
+              <a:ext uri="{FF2B5EF4-FFF2-40B4-BE49-F238E27FC236}">
+                <a16:creationId xmlns:a16="http://schemas.microsoft.com/office/drawing/2014/main" id="{29B43ABB-7AAB-8BA8-E862-AE9E26421314}"/>
+              </a:ext>
+            </a:extLst>
+          </p:cNvPr>
+          <p:cNvSpPr>
+            <a:spLocks noGrp="1" noRot="1" noChangeAspect="1"/>
+          </p:cNvSpPr>
+          <p:nvPr>
+            <p:ph type="sldImg"/>
+          </p:nvPr>
+        </p:nvSpPr>
+        <p:spPr/>
+      </p:sp>
+      <p:sp>
+        <p:nvSpPr>
+          <p:cNvPr id="3" name="Notes Placeholder 2">
+            <a:extLst>
+              <a:ext uri="{FF2B5EF4-FFF2-40B4-BE49-F238E27FC236}">
+                <a16:creationId xmlns:a16="http://schemas.microsoft.com/office/drawing/2014/main" id="{9B245C1E-9A95-56A6-D11F-AEE6B8BAE984}"/>
+              </a:ext>
+            </a:extLst>
+          </p:cNvPr>
+          <p:cNvSpPr>
+            <a:spLocks noGrp="1"/>
+          </p:cNvSpPr>
+          <p:nvPr>
+            <p:ph type="body" idx="1"/>
+          </p:nvPr>
+        </p:nvSpPr>
+        <p:spPr/>
+        <p:txBody>
+          <a:bodyPr/>
+          <a:lstStyle/>
+          <a:p>
+            <a:endParaRPr lang="en-US" dirty="0"/>
+          </a:p>
+        </p:txBody>
+      </p:sp>
+      <p:sp>
+        <p:nvSpPr>
+          <p:cNvPr id="4" name="Slide Number Placeholder 3">
+            <a:extLst>
+              <a:ext uri="{FF2B5EF4-FFF2-40B4-BE49-F238E27FC236}">
+                <a16:creationId xmlns:a16="http://schemas.microsoft.com/office/drawing/2014/main" id="{D9F377DB-D978-2D68-4717-45591F0C5A53}"/>
+              </a:ext>
+            </a:extLst>
+          </p:cNvPr>
+          <p:cNvSpPr>
+            <a:spLocks noGrp="1"/>
+          </p:cNvSpPr>
+          <p:nvPr>
+            <p:ph type="sldNum" sz="quarter" idx="10"/>
+          </p:nvPr>
+        </p:nvSpPr>
+        <p:spPr/>
+        <p:txBody>
+          <a:bodyPr/>
+          <a:lstStyle/>
+          <a:p>
+            <a:fld id="{F7021451-1387-4CA6-816F-3879F97B5CBC}" type="slidenum">
+              <a:rPr lang="en-US"/>
+              <a:t>10</a:t>
+            </a:fld>
+            <a:endParaRPr lang="en-US"/>
+          </a:p>
+        </p:txBody>
+      </p:sp>
+    </p:spTree>
+    <p:extLst>
+      <p:ext uri="{BB962C8B-B14F-4D97-AF65-F5344CB8AC3E}">
+        <p14:creationId xmlns:p14="http://schemas.microsoft.com/office/powerpoint/2010/main" val="3267666980"/>
+      </p:ext>
+    </p:extLst>
+  </p:cSld>
+  <p:clrMapOvr>
+    <a:masterClrMapping/>
+  </p:clrMapOvr>
+</p:notes>
+</file>
+
+<file path=ppt/notesSlides/notesSlide11.xml><?xml version="1.0" encoding="utf-8"?>
+<p:notes xmlns:a="http://schemas.openxmlformats.org/drawingml/2006/main" xmlns:r="http://schemas.openxmlformats.org/officeDocument/2006/relationships" xmlns:p="http://schemas.openxmlformats.org/presentationml/2006/main">
+  <p:cSld>
+    <p:spTree>
+      <p:nvGrpSpPr>
         <p:cNvPr id="1" name=""/>
         <p:cNvGrpSpPr/>
         <p:nvPr/>
@@ -395,7 +504,7 @@
           <a:p>
             <a:fld id="{F7021451-1387-4CA6-816F-3879F97B5CBC}" type="slidenum">
               <a:rPr lang="en-US"/>
-              <a:t>10</a:t>
+              <a:t>11</a:t>
             </a:fld>
             <a:endParaRPr lang="en-US"/>
           </a:p>
@@ -1602,6 +1711,314 @@
 </file>
 
 <file path=ppt/slides/slide10.xml><?xml version="1.0" encoding="utf-8"?>
+<p:sld xmlns:a="http://schemas.openxmlformats.org/drawingml/2006/main" xmlns:r="http://schemas.openxmlformats.org/officeDocument/2006/relationships" xmlns:p="http://schemas.openxmlformats.org/presentationml/2006/main">
+  <p:cSld>
+    <p:bg>
+      <p:bgPr>
+        <a:solidFill>
+          <a:srgbClr val="0F172A"/>
+        </a:solidFill>
+        <a:effectLst/>
+      </p:bgPr>
+    </p:bg>
+    <p:spTree>
+      <p:nvGrpSpPr>
+        <p:cNvPr id="1" name="">
+          <a:extLst>
+            <a:ext uri="{FF2B5EF4-FFF2-40B4-BE49-F238E27FC236}">
+              <a16:creationId xmlns:a16="http://schemas.microsoft.com/office/drawing/2014/main" id="{40BFCDBB-5CE2-350E-A706-8B3C46C82714}"/>
+            </a:ext>
+          </a:extLst>
+        </p:cNvPr>
+        <p:cNvGrpSpPr/>
+        <p:nvPr/>
+      </p:nvGrpSpPr>
+      <p:grpSpPr>
+        <a:xfrm>
+          <a:off x="0" y="0"/>
+          <a:ext cx="0" cy="0"/>
+          <a:chOff x="0" y="0"/>
+          <a:chExt cx="0" cy="0"/>
+        </a:xfrm>
+      </p:grpSpPr>
+      <p:sp>
+        <p:nvSpPr>
+          <p:cNvPr id="2" name="Text 0">
+            <a:extLst>
+              <a:ext uri="{FF2B5EF4-FFF2-40B4-BE49-F238E27FC236}">
+                <a16:creationId xmlns:a16="http://schemas.microsoft.com/office/drawing/2014/main" id="{B8052976-0BD5-5554-27C7-2C8BCF776459}"/>
+              </a:ext>
+            </a:extLst>
+          </p:cNvPr>
+          <p:cNvSpPr/>
+          <p:nvPr/>
+        </p:nvSpPr>
+        <p:spPr>
+          <a:xfrm>
+            <a:off x="609600" y="727587"/>
+            <a:ext cx="8083296" cy="411427"/>
+          </a:xfrm>
+          <a:prstGeom prst="rect">
+            <a:avLst/>
+          </a:prstGeom>
+          <a:noFill/>
+          <a:ln/>
+        </p:spPr>
+        <p:txBody>
+          <a:bodyPr wrap="square" lIns="0" tIns="0" rIns="0" bIns="0" rtlCol="0" anchor="t"/>
+          <a:lstStyle/>
+          <a:p>
+            <a:pPr marL="0" indent="0">
+              <a:lnSpc>
+                <a:spcPts val="3240"/>
+              </a:lnSpc>
+              <a:buNone/>
+            </a:pPr>
+            <a:r>
+              <a:rPr lang="en-US" sz="2700" b="1" dirty="0">
+                <a:solidFill>
+                  <a:srgbClr val="38BDF8"/>
+                </a:solidFill>
+                <a:latin typeface="Arial" pitchFamily="34" charset="0"/>
+                <a:ea typeface="Arial" pitchFamily="34" charset="-122"/>
+                <a:cs typeface="Arial" pitchFamily="34" charset="-120"/>
+              </a:rPr>
+              <a:t>Key Insights from Output</a:t>
+            </a:r>
+            <a:endParaRPr lang="en-US" sz="2700" dirty="0"/>
+          </a:p>
+        </p:txBody>
+      </p:sp>
+      <p:sp>
+        <p:nvSpPr>
+          <p:cNvPr id="3" name="Text 1">
+            <a:extLst>
+              <a:ext uri="{FF2B5EF4-FFF2-40B4-BE49-F238E27FC236}">
+                <a16:creationId xmlns:a16="http://schemas.microsoft.com/office/drawing/2014/main" id="{E6880E03-4247-2727-21A9-B93A945B23BC}"/>
+              </a:ext>
+            </a:extLst>
+          </p:cNvPr>
+          <p:cNvSpPr/>
+          <p:nvPr/>
+        </p:nvSpPr>
+        <p:spPr>
+          <a:xfrm>
+            <a:off x="914400" y="1249626"/>
+            <a:ext cx="7620000" cy="1154112"/>
+          </a:xfrm>
+          <a:prstGeom prst="rect">
+            <a:avLst/>
+          </a:prstGeom>
+          <a:noFill/>
+          <a:ln/>
+        </p:spPr>
+        <p:txBody>
+          <a:bodyPr wrap="square" lIns="0" tIns="0" rIns="0" bIns="0" rtlCol="0" anchor="t"/>
+          <a:lstStyle/>
+          <a:p>
+            <a:pPr marL="342900" indent="-342900">
+              <a:lnSpc>
+                <a:spcPts val="2430"/>
+              </a:lnSpc>
+              <a:buSzPct val="100000"/>
+              <a:buChar char="•"/>
+            </a:pPr>
+            <a:endParaRPr lang="en-US" sz="1350" dirty="0"/>
+          </a:p>
+        </p:txBody>
+      </p:sp>
+      <p:sp>
+        <p:nvSpPr>
+          <p:cNvPr id="4" name="Rectangle 1">
+            <a:extLst>
+              <a:ext uri="{FF2B5EF4-FFF2-40B4-BE49-F238E27FC236}">
+                <a16:creationId xmlns:a16="http://schemas.microsoft.com/office/drawing/2014/main" id="{6CC06FEE-F0AF-D912-D108-F2BAC8F17827}"/>
+              </a:ext>
+            </a:extLst>
+          </p:cNvPr>
+          <p:cNvSpPr>
+            <a:spLocks noChangeArrowheads="1"/>
+          </p:cNvSpPr>
+          <p:nvPr/>
+        </p:nvSpPr>
+        <p:spPr bwMode="auto">
+          <a:xfrm>
+            <a:off x="663677" y="1480408"/>
+            <a:ext cx="8243070" cy="923330"/>
+          </a:xfrm>
+          <a:prstGeom prst="rect">
+            <a:avLst/>
+          </a:prstGeom>
+          <a:noFill/>
+          <a:ln>
+            <a:noFill/>
+          </a:ln>
+          <a:effectLst/>
+          <a:extLst>
+            <a:ext uri="{909E8E84-426E-40DD-AFC4-6F175D3DCCD1}">
+              <a14:hiddenFill xmlns:a14="http://schemas.microsoft.com/office/drawing/2010/main">
+                <a:solidFill>
+                  <a:schemeClr val="accent1"/>
+                </a:solidFill>
+              </a14:hiddenFill>
+            </a:ext>
+            <a:ext uri="{91240B29-F687-4F45-9708-019B960494DF}">
+              <a14:hiddenLine xmlns:a14="http://schemas.microsoft.com/office/drawing/2010/main" w="9525">
+                <a:solidFill>
+                  <a:schemeClr val="tx1"/>
+                </a:solidFill>
+                <a:miter lim="800000"/>
+                <a:headEnd/>
+                <a:tailEnd/>
+              </a14:hiddenLine>
+            </a:ext>
+            <a:ext uri="{AF507438-7753-43E0-B8FC-AC1667EBCBE1}">
+              <a14:hiddenEffects xmlns:a14="http://schemas.microsoft.com/office/drawing/2010/main">
+                <a:effectLst>
+                  <a:outerShdw dist="35921" dir="2700000" algn="ctr" rotWithShape="0">
+                    <a:schemeClr val="bg2"/>
+                  </a:outerShdw>
+                </a:effectLst>
+              </a14:hiddenEffects>
+            </a:ext>
+          </a:extLst>
+        </p:spPr>
+        <p:txBody>
+          <a:bodyPr vert="horz" wrap="square" lIns="91440" tIns="45720" rIns="91440" bIns="45720" numCol="1" anchor="ctr" anchorCtr="0" compatLnSpc="1">
+            <a:prstTxWarp prst="textNoShape">
+              <a:avLst/>
+            </a:prstTxWarp>
+            <a:spAutoFit/>
+          </a:bodyPr>
+          <a:lstStyle/>
+          <a:p>
+            <a:pPr marL="0" marR="0" lvl="0" indent="0" algn="l" defTabSz="914400" rtl="0" eaLnBrk="0" fontAlgn="base" latinLnBrk="0" hangingPunct="0">
+              <a:lnSpc>
+                <a:spcPct val="100000"/>
+              </a:lnSpc>
+              <a:spcBef>
+                <a:spcPct val="0"/>
+              </a:spcBef>
+              <a:spcAft>
+                <a:spcPct val="0"/>
+              </a:spcAft>
+              <a:buClrTx/>
+              <a:buSzTx/>
+              <a:buFontTx/>
+              <a:buChar char="•"/>
+              <a:tabLst/>
+            </a:pPr>
+            <a:r>
+              <a:rPr lang="en-US" altLang="en-US" sz="1350" dirty="0">
+                <a:solidFill>
+                  <a:srgbClr val="CBD5E1"/>
+                </a:solidFill>
+                <a:latin typeface="Arial" pitchFamily="34" charset="0"/>
+                <a:cs typeface="Arial" pitchFamily="34" charset="-120"/>
+              </a:rPr>
+              <a:t> Final model accuracy ≈ 83% → decent performance</a:t>
+            </a:r>
+          </a:p>
+          <a:p>
+            <a:pPr marL="0" marR="0" lvl="0" indent="0" algn="l" defTabSz="914400" rtl="0" eaLnBrk="0" fontAlgn="base" latinLnBrk="0" hangingPunct="0">
+              <a:lnSpc>
+                <a:spcPct val="100000"/>
+              </a:lnSpc>
+              <a:spcBef>
+                <a:spcPct val="0"/>
+              </a:spcBef>
+              <a:spcAft>
+                <a:spcPct val="0"/>
+              </a:spcAft>
+              <a:buClrTx/>
+              <a:buSzTx/>
+              <a:buFontTx/>
+              <a:buChar char="•"/>
+              <a:tabLst/>
+            </a:pPr>
+            <a:r>
+              <a:rPr lang="en-US" altLang="en-US" sz="1350" dirty="0">
+                <a:solidFill>
+                  <a:srgbClr val="CBD5E1"/>
+                </a:solidFill>
+                <a:latin typeface="Arial" pitchFamily="34" charset="0"/>
+                <a:cs typeface="Arial" pitchFamily="34" charset="-120"/>
+              </a:rPr>
+              <a:t> High recall for approved loans (94%) → very few approved loans missed → good for bank</a:t>
+            </a:r>
+          </a:p>
+          <a:p>
+            <a:pPr marL="0" marR="0" lvl="0" indent="0" algn="l" defTabSz="914400" rtl="0" eaLnBrk="0" fontAlgn="base" latinLnBrk="0" hangingPunct="0">
+              <a:lnSpc>
+                <a:spcPct val="100000"/>
+              </a:lnSpc>
+              <a:spcBef>
+                <a:spcPct val="0"/>
+              </a:spcBef>
+              <a:spcAft>
+                <a:spcPct val="0"/>
+              </a:spcAft>
+              <a:buClrTx/>
+              <a:buSzTx/>
+              <a:buFontTx/>
+              <a:buChar char="•"/>
+              <a:tabLst/>
+            </a:pPr>
+            <a:r>
+              <a:rPr lang="en-US" altLang="en-US" sz="1350" dirty="0">
+                <a:solidFill>
+                  <a:srgbClr val="CBD5E1"/>
+                </a:solidFill>
+                <a:latin typeface="Arial" pitchFamily="34" charset="0"/>
+                <a:cs typeface="Arial" pitchFamily="34" charset="-120"/>
+              </a:rPr>
+              <a:t> Some false positives for not approved loans (16) → bank may review some extra cases</a:t>
+            </a:r>
+          </a:p>
+          <a:p>
+            <a:pPr marL="0" marR="0" lvl="0" indent="0" algn="l" defTabSz="914400" rtl="0" eaLnBrk="0" fontAlgn="base" latinLnBrk="0" hangingPunct="0">
+              <a:lnSpc>
+                <a:spcPct val="100000"/>
+              </a:lnSpc>
+              <a:spcBef>
+                <a:spcPct val="0"/>
+              </a:spcBef>
+              <a:spcAft>
+                <a:spcPct val="0"/>
+              </a:spcAft>
+              <a:buClrTx/>
+              <a:buSzTx/>
+              <a:buFontTx/>
+              <a:buChar char="•"/>
+              <a:tabLst/>
+            </a:pPr>
+            <a:r>
+              <a:rPr lang="en-US" altLang="en-US" sz="1350" dirty="0">
+                <a:solidFill>
+                  <a:srgbClr val="CBD5E1"/>
+                </a:solidFill>
+                <a:latin typeface="Arial" pitchFamily="34" charset="0"/>
+                <a:cs typeface="Arial" pitchFamily="34" charset="-120"/>
+              </a:rPr>
+              <a:t> ROC-AUC = 0.828 → model ranks applicants well for probability of approval</a:t>
+            </a:r>
+          </a:p>
+        </p:txBody>
+      </p:sp>
+    </p:spTree>
+    <p:extLst>
+      <p:ext uri="{BB962C8B-B14F-4D97-AF65-F5344CB8AC3E}">
+        <p14:creationId xmlns:p14="http://schemas.microsoft.com/office/powerpoint/2010/main" val="1090879840"/>
+      </p:ext>
+    </p:extLst>
+  </p:cSld>
+  <p:clrMapOvr>
+    <a:masterClrMapping/>
+  </p:clrMapOvr>
+</p:sld>
+</file>
+
+<file path=ppt/slides/slide11.xml><?xml version="1.0" encoding="utf-8"?>
 <p:sld xmlns:a="http://schemas.openxmlformats.org/drawingml/2006/main" xmlns:r="http://schemas.openxmlformats.org/officeDocument/2006/relationships" xmlns:p="http://schemas.openxmlformats.org/presentationml/2006/main">
   <p:cSld name="Slide 10">
     <p:bg>
